--- a/apps/resources/bundled_files/6-klass-tamgaluu-tuyuntmalar-tendemeler-sabak.pptx
+++ b/apps/resources/bundled_files/6-klass-tamgaluu-tuyuntmalar-tendemeler-sabak.pptx
@@ -5196,7 +5196,7 @@
                 </a:solidFill>
                 <a:latin typeface="PT Sans"/>
               </a:rPr>
-              <a:t>6-класс · Математика</a:t>
+              <a:t/>
             </a:r>
           </a:p>
         </p:txBody>
@@ -5688,7 +5688,7 @@
                 </a:solidFill>
                 <a:latin typeface="PT Sans"/>
               </a:rPr>
-              <a:t>6-класс ›</a:t>
+              <a:t/>
             </a:r>
           </a:p>
           <a:p>
@@ -6621,7 +6621,7 @@
                 </a:solidFill>
                 <a:latin typeface="PT Sans"/>
               </a:rPr>
-              <a:t>6-класс ›</a:t>
+              <a:t/>
             </a:r>
           </a:p>
           <a:p>
@@ -9089,7 +9089,7 @@
                 </a:solidFill>
                 <a:latin typeface="PT Sans"/>
               </a:rPr>
-              <a:t>6-класс ›</a:t>
+              <a:t/>
             </a:r>
           </a:p>
           <a:p>
@@ -10699,7 +10699,7 @@
                 </a:solidFill>
                 <a:latin typeface="PT Sans"/>
               </a:rPr>
-              <a:t>6-класс ›</a:t>
+              <a:t/>
             </a:r>
           </a:p>
           <a:p>
@@ -12282,7 +12282,7 @@
                 </a:solidFill>
                 <a:latin typeface="PT Sans"/>
               </a:rPr>
-              <a:t>6-класс ›</a:t>
+              <a:t/>
             </a:r>
           </a:p>
           <a:p>
@@ -13033,7 +13033,7 @@
                 </a:solidFill>
                 <a:latin typeface="PT Sans"/>
               </a:rPr>
-              <a:t>6-класс ›</a:t>
+              <a:t/>
             </a:r>
           </a:p>
           <a:p>
@@ -13823,7 +13823,7 @@
                 </a:solidFill>
                 <a:latin typeface="PT Sans"/>
               </a:rPr>
-              <a:t>6-класс ›</a:t>
+              <a:t/>
             </a:r>
           </a:p>
           <a:p>
@@ -15489,7 +15489,7 @@
                 </a:solidFill>
                 <a:latin typeface="PT Sans"/>
               </a:rPr>
-              <a:t>6-класс ›</a:t>
+              <a:t/>
             </a:r>
           </a:p>
           <a:p>
@@ -16573,7 +16573,7 @@
                 </a:solidFill>
                 <a:latin typeface="PT Sans"/>
               </a:rPr>
-              <a:t>6-класс ›</a:t>
+              <a:t/>
             </a:r>
           </a:p>
           <a:p>
@@ -18103,7 +18103,7 @@
                 </a:solidFill>
                 <a:latin typeface="PT Sans"/>
               </a:rPr>
-              <a:t>6-класс ›</a:t>
+              <a:t/>
             </a:r>
           </a:p>
           <a:p>
@@ -20123,7 +20123,7 @@
                 </a:solidFill>
                 <a:latin typeface="PT Sans"/>
               </a:rPr>
-              <a:t>6-класс ›</a:t>
+              <a:t/>
             </a:r>
           </a:p>
           <a:p>
@@ -21400,7 +21400,7 @@
                 </a:solidFill>
                 <a:latin typeface="PT Sans"/>
               </a:rPr>
-              <a:t>6-класс ›</a:t>
+              <a:t/>
             </a:r>
           </a:p>
           <a:p>
@@ -22828,7 +22828,7 @@
                 </a:solidFill>
                 <a:latin typeface="PT Sans"/>
               </a:rPr>
-              <a:t>6-класс ›</a:t>
+              <a:t/>
             </a:r>
           </a:p>
           <a:p>
@@ -24284,7 +24284,7 @@
                 </a:solidFill>
                 <a:latin typeface="PT Sans"/>
               </a:rPr>
-              <a:t>6-класс ›</a:t>
+              <a:t/>
             </a:r>
           </a:p>
           <a:p>
@@ -25488,7 +25488,7 @@
                 </a:solidFill>
                 <a:latin typeface="PT Sans"/>
               </a:rPr>
-              <a:t>6-класс ›</a:t>
+              <a:t/>
             </a:r>
           </a:p>
           <a:p>
@@ -26288,7 +26288,7 @@
                 </a:solidFill>
                 <a:latin typeface="PT Sans"/>
               </a:rPr>
-              <a:t>6-класс ›</a:t>
+              <a:t/>
             </a:r>
           </a:p>
           <a:p>
@@ -27129,7 +27129,7 @@
                 </a:solidFill>
                 <a:latin typeface="PT Sans"/>
               </a:rPr>
-              <a:t>6-класс ›</a:t>
+              <a:t/>
             </a:r>
           </a:p>
           <a:p>
@@ -28078,7 +28078,7 @@
                 </a:solidFill>
                 <a:latin typeface="PT Sans"/>
               </a:rPr>
-              <a:t>6-класс ›</a:t>
+              <a:t/>
             </a:r>
           </a:p>
           <a:p>
@@ -29532,7 +29532,7 @@
                 </a:solidFill>
                 <a:latin typeface="PT Sans"/>
               </a:rPr>
-              <a:t>6-класс ›</a:t>
+              <a:t/>
             </a:r>
           </a:p>
           <a:p>
@@ -30278,7 +30278,7 @@
                 </a:solidFill>
                 <a:latin typeface="PT Sans"/>
               </a:rPr>
-              <a:t>6-класс ›</a:t>
+              <a:t/>
             </a:r>
           </a:p>
           <a:p>
@@ -31086,7 +31086,7 @@
                 </a:solidFill>
                 <a:latin typeface="PT Sans"/>
               </a:rPr>
-              <a:t>6-класс ›</a:t>
+              <a:t/>
             </a:r>
           </a:p>
           <a:p>
@@ -32277,7 +32277,7 @@
                 </a:solidFill>
                 <a:latin typeface="PT Sans"/>
               </a:rPr>
-              <a:t>6-класс ›</a:t>
+              <a:t/>
             </a:r>
           </a:p>
           <a:p>
@@ -33456,7 +33456,7 @@
                 </a:solidFill>
                 <a:latin typeface="PT Sans"/>
               </a:rPr>
-              <a:t>6-класс ›</a:t>
+              <a:t/>
             </a:r>
           </a:p>
           <a:p>
@@ -33637,7 +33637,7 @@
                 </a:solidFill>
                 <a:latin typeface="PT Sans"/>
               </a:rPr>
-              <a:t>3–4-класс</a:t>
+              <a:t/>
             </a:r>
           </a:p>
         </p:txBody>
@@ -33817,7 +33817,7 @@
                 </a:solidFill>
                 <a:latin typeface="PT Sans"/>
               </a:rPr>
-              <a:t>5-класс</a:t>
+              <a:t/>
             </a:r>
           </a:p>
         </p:txBody>
@@ -33997,7 +33997,7 @@
                 </a:solidFill>
                 <a:latin typeface="PT Sans"/>
               </a:rPr>
-              <a:t>6-класс</a:t>
+              <a:t/>
             </a:r>
           </a:p>
         </p:txBody>
@@ -34233,7 +34233,7 @@
                 </a:solidFill>
                 <a:latin typeface="PT Sans"/>
               </a:rPr>
-              <a:t>7-класс</a:t>
+              <a:t/>
             </a:r>
           </a:p>
         </p:txBody>
@@ -34653,7 +34653,7 @@
                 </a:solidFill>
                 <a:latin typeface="PT Sans"/>
               </a:rPr>
-              <a:t>6-класс ›</a:t>
+              <a:t/>
             </a:r>
           </a:p>
           <a:p>
@@ -35801,7 +35801,7 @@
                 </a:solidFill>
                 <a:latin typeface="PT Sans"/>
               </a:rPr>
-              <a:t>6-класс ›</a:t>
+              <a:t/>
             </a:r>
           </a:p>
           <a:p>

--- a/apps/resources/bundled_files/6-klass-tamgaluu-tuyuntmalar-tendemeler-sabak.pptx
+++ b/apps/resources/bundled_files/6-klass-tamgaluu-tuyuntmalar-tendemeler-sabak.pptx
@@ -1582,7 +1582,7 @@
           <a:lstStyle/>
           <a:p>
             <a:r>
-              <a:t>Ой жүгүртүү маданияты (Wenxi Lee, 2.6).</a:t>
+              <a:t>Ой жүгүртүү маданияты (Wenxi Lee, 2,6).</a:t>
             </a:r>
           </a:p>
         </p:txBody>
@@ -14470,7 +14470,7 @@
                 </a:solidFill>
                 <a:latin typeface="PT Sans"/>
               </a:rPr>
-              <a:t>2xти жап: □ + 5 = 17</a:t>
+              <a:t>2хти жап: □ + 5 = 17</a:t>
             </a:r>
           </a:p>
         </p:txBody>
